--- a/examples/all-hands.pptx
+++ b/examples/all-hands.pptx
@@ -4267,7 +4267,7 @@
           <a:p>
             <a:pPr algn="l"/>
             <a:r>
-              <a:rPr sz="4600" b="1" i="0">
+              <a:rPr sz="3909" b="1" i="0">
                 <a:solidFill>
                   <a:srgbClr val="333333"/>
                 </a:solidFill>

--- a/examples/all-hands.pptx
+++ b/examples/all-hands.pptx
@@ -3358,8 +3358,8 @@
         </p:nvSpPr>
         <p:spPr>
           <a:xfrm>
-            <a:off x="731520" y="2194560"/>
-            <a:ext cx="10698480" cy="1463040"/>
+            <a:off x="731520" y="1920240"/>
+            <a:ext cx="10698480" cy="1737360"/>
           </a:xfrm>
           <a:prstGeom prst="rect">
             <a:avLst/>
@@ -4286,8 +4286,8 @@
         </p:nvSpPr>
         <p:spPr>
           <a:xfrm>
-            <a:off x="594360" y="3337560"/>
-            <a:ext cx="2338578" cy="457200"/>
+            <a:off x="594360" y="3154680"/>
+            <a:ext cx="2338578" cy="411480"/>
           </a:xfrm>
           <a:prstGeom prst="rect">
             <a:avLst/>
@@ -4479,8 +4479,8 @@
         </p:nvSpPr>
         <p:spPr>
           <a:xfrm>
-            <a:off x="3481577" y="3337560"/>
-            <a:ext cx="2338578" cy="457200"/>
+            <a:off x="3481577" y="3154680"/>
+            <a:ext cx="2338578" cy="411480"/>
           </a:xfrm>
           <a:prstGeom prst="rect">
             <a:avLst/>
@@ -4672,8 +4672,8 @@
         </p:nvSpPr>
         <p:spPr>
           <a:xfrm>
-            <a:off x="6368796" y="3337560"/>
-            <a:ext cx="2338578" cy="457200"/>
+            <a:off x="6368796" y="3154680"/>
+            <a:ext cx="2338578" cy="411480"/>
           </a:xfrm>
           <a:prstGeom prst="rect">
             <a:avLst/>
@@ -4865,8 +4865,8 @@
         </p:nvSpPr>
         <p:spPr>
           <a:xfrm>
-            <a:off x="9256014" y="3337560"/>
-            <a:ext cx="2338578" cy="457200"/>
+            <a:off x="9256014" y="3154680"/>
+            <a:ext cx="2338578" cy="411480"/>
           </a:xfrm>
           <a:prstGeom prst="rect">
             <a:avLst/>

--- a/examples/all-hands.pptx
+++ b/examples/all-hands.pptx
@@ -4980,7 +4980,7 @@
       </p:sp>
       <p:graphicFrame>
         <p:nvGraphicFramePr>
-          <p:cNvPr id="4" name="Chart 3"/>
+          <p:cNvPr id="4" name="Chart 3" descr="Receita cresce pelo 5º trimestre seguido"/>
           <p:cNvGraphicFramePr>
             <a:graphicFrameLocks noGrp="1"/>
           </p:cNvGraphicFramePr>
